--- a/decks/hist-plantagenets/hist-plantagenets_ch4_who-was-to-blame.pptx
+++ b/decks/hist-plantagenets/hist-plantagenets_ch4_who-was-to-blame.pptx
@@ -125,29 +125,29 @@
   <p:extLst>
     <p:ext uri="{521415D9-36F7-43E2-AB2F-B90AF26B5E84}">
       <p14:sectionLst xmlns:p14="http://schemas.microsoft.com/office/powerpoint/2010/main">
-        <p14:section name="Opening" id="{a90fa542-db59-0d57-ca0f-798f1cac6094}">
+        <p14:section name="Opening" id="{81ebe5a7-12ad-6e65-ad61-7f3a74fa2da5}">
           <p14:sldIdLst>
             <p14:sldId id="256"/>
           </p14:sldIdLst>
         </p14:section>
-        <p14:section name="Gate" id="{a6bb298f-09fb-a10b-1f47-7efa76d10d27}">
+        <p14:section name="Gate" id="{20166624-3dc1-aec8-d865-b6e5b46966a9}">
           <p14:sldIdLst>
             <p14:sldId id="257"/>
             <p14:sldId id="258"/>
           </p14:sldIdLst>
         </p14:section>
-        <p14:section name="Pre-teach" id="{c1486dcf-0b66-2ea4-b0e1-9ee0d95a1b60}">
+        <p14:section name="Pre-teach" id="{ed1cd642-f6bd-1e2d-965e-46a3b52d99a3}">
           <p14:sldIdLst>
             <p14:sldId id="259"/>
           </p14:sldIdLst>
         </p14:section>
-        <p14:section name="Read-along" id="{7cfb6a5b-06b3-3fc9-72c7-41d486dc846f}">
+        <p14:section name="Read-along" id="{46e1d3e5-8997-d971-058d-d494dffd3b8b}">
           <p14:sldIdLst>
             <p14:sldId id="260"/>
             <p14:sldId id="261"/>
           </p14:sldIdLst>
         </p14:section>
-        <p14:section name="Teach" id="{56868535-1c9a-0535-7ece-9fb212ab63cf}">
+        <p14:section name="Teach" id="{f0d20acb-1699-03ee-5f30-e77f0aced6b2}">
           <p14:sldIdLst>
             <p14:sldId id="262"/>
             <p14:sldId id="263"/>
@@ -156,7 +156,7 @@
             <p14:sldId id="266"/>
           </p14:sldIdLst>
         </p14:section>
-        <p14:section name="Routes" id="{84713772-5517-72e3-f4e3-d2b09134b693}">
+        <p14:section name="Routes" id="{58cf0bdf-6292-da5c-d485-a3326814cc9f}">
           <p14:sldIdLst>
             <p14:sldId id="267"/>
             <p14:sldId id="268"/>
@@ -164,12 +164,12 @@
             <p14:sldId id="270"/>
           </p14:sldIdLst>
         </p14:section>
-        <p14:section name="Close" id="{0d14dfc9-0955-ab4c-c47b-e1f940f4ac1c}">
+        <p14:section name="Close" id="{d12b1c89-7bb2-285d-b26e-ceaad1942f51}">
           <p14:sldIdLst>
             <p14:sldId id="271"/>
           </p14:sldIdLst>
         </p14:section>
-        <p14:section name="Answers" id="{405e08bc-3168-0853-6d0e-73d229b8fbf5}">
+        <p14:section name="Answers" id="{d210064b-8155-1bf3-3bfa-058ab3e63a9b}">
           <p14:sldIdLst>
             <p14:sldId id="272"/>
             <p14:sldId id="273"/>
@@ -675,7 +675,7 @@
 Historians also sort causes by time. A long-term cause builds up over months or years before the event. A short-term cause happens just before it, in the final days or hours. Both kinds are needed for an event to happen: the long-term causes load the gun, and the short-term causes pull the trigger.
 Your lesson's answer slide sorted the nine causes like this. Long-term: Henry's terrible temper; Henry asking the Archbishop of York to crown the next king; Becket breaking his promises on his return in 1170; Becket refusing to let the king punish the priests; Becket running away to France. Short-term: Henry shouting about the troublesome priest; Becket refusing to leave the cathedral; the knights deciding to kill Becket brutally; the knights setting off for Canterbury straight away.
 You may disagree with one or two of these, and that is allowed, as long as you can argue it. Becket's return and the excommunications happened in 1170, the same year as the murder, yet the slide calls them long-term. A historian might say they were the last step in a quarrel that had lasted six years, and so belong with the long-term causes. Another might say they were the spark. State your reason either way.
-Worked example — model it step by step, thinking aloud: Is this a short-term or a long-term cause? In 1170, while Becket was in France, Henry asked the Archbishop of York to crown the next king. (1) Ask when it happened in relation to the murder. It happened while Becket was still in France, before his return and before the final quarrel. (2) Ask whether it is part of a build-up or a final spark. It added to a quarrel that had been running since 1164, so it is part of the build-up. (3) Your lesson's answer slide agrees: it marks this cause LT. (4) Write the judgement in a sentence: This is a long-term cause because it deepened the quarrel months before the murder rather than triggering it. Answer: A long-term cause: it deepened the quarrel before Becket returned, rather than triggering the murder itself..
+Worked example — model it step by step, thinking aloud: Is this a short-term or a long-term cause? In 1170, with Becket still in France, Henry had his son crowned by the Archbishop of York. (1) Ask when it happened in relation to the murder. It happened while Becket was still in France, before his return and before the final quarrel. (2) Ask whether it is part of a build-up or a final spark. It added to a quarrel that had been running since 1164, so it is part of the build-up. (3) Your lesson's answer slide agrees: it marks this cause LT. (4) Write the judgement in a sentence: This is a long-term cause because it deepened the quarrel months before the murder rather than triggering it. Answer: A long-term cause: it deepened the quarrel before Becket returned, rather than triggering the murder itself..
 Tip: ST = short-term, LT = long-term. Write the letters next to each cause, then check your pattern: the short-term causes should all come from the last few days.</a:t>
             </a:r>
             <a:endParaRPr lang="en-US" dirty="0"/>
@@ -2073,8 +2073,8 @@
             <a:r>
               <a:rPr lang="en-US" dirty="0"/>
               <a:t>Teach — Three suspects. Say it in your own words, then check understanding with a quick question: ask a pupil from the pre-teach group first, since they met these words and ideas before the lesson. Pupils try to recall before you re-explain.
-Your lesson gave you nine causes of the murder and asked you to sort them into three columns: King Henry was to blame, Thomas Becket was to blame, the knights were to blame. Here they are, grouped the way your lesson's answer slide grouped them.
-Henry: he was well known for a terrible temper. In 1170 he asked the Archbishop of York to crown the next king, which should have been Becket's job. And he shouted the words about the troublesome priest in front of the knights. Becket: when he returned from France in 1170 he broke his promises to Henry by excommunicating other bishops and the Archbishop of York. He refused to let the king punish priests who broke the law, and in 1164 he changed his mind about the Church court rules and fled to France. In the cathedral, he refused to leave when the knights threatened him. The knights: they set off for Canterbury straight away without asking Henry whether he wanted Becket killed. Henry sent a messenger after them, but it was too late. And they chose to kill Becket in a brutal way instead of forcing him to leave the country.
+Your lesson gave you nine causes of the murder and asked you to sort them into three columns, one for each person who might be blamed: King Henry, Thomas Becket, or the knights. Here they are, grouped the way your lesson's answer slide grouped them.
+Henry: he was well known for a terrible temper. In 1170 he had the Archbishop of York crown the next king — a job that belonged to Becket. And he shouted the words about the troublesome priest in front of the knights. Becket: when he returned from France in 1170 he broke his promises to Henry by excommunicating other bishops and the Archbishop of York. He refused to let the king punish priests who broke the law, and in 1164 he changed his mind about the Church court rules and fled to France. In the cathedral, he refused to leave when the knights threatened him. The knights: they set off for Canterbury straight away without asking Henry whether he wanted Becket killed. Henry sent a messenger after them, but it was too late. And they chose to kill Becket, and to kill him brutally, rather than simply drive him out of the country.
 Notice the warning your lesson gave: some causes fit more than one column. Henry's shout belongs to Henry, but the knights' decision to act on it belongs to them. You have to decide who is most to blame, and that means weighing the causes, not just counting them.
 Tip: Nine causes, three columns. Before you judge, make sure you can place every cause and say why it sits where it does.</a:t>
             </a:r>
@@ -2168,7 +2168,7 @@
 Historians also sort causes by time. A long-term cause builds up over months or years before the event. A short-term cause happens just before it, in the final days or hours. Both kinds are needed for an event to happen: the long-term causes load the gun, and the short-term causes pull the trigger.
 Your lesson's answer slide sorted the nine causes like this. Long-term: Henry's terrible temper; Henry asking the Archbishop of York to crown the next king; Becket breaking his promises on his return in 1170; Becket refusing to let the king punish the priests; Becket running away to France. Short-term: Henry shouting about the troublesome priest; Becket refusing to leave the cathedral; the knights deciding to kill Becket brutally; the knights setting off for Canterbury straight away.
 You may disagree with one or two of these, and that is allowed, as long as you can argue it. Becket's return and the excommunications happened in 1170, the same year as the murder, yet the slide calls them long-term. A historian might say they were the last step in a quarrel that had lasted six years, and so belong with the long-term causes. Another might say they were the spark. State your reason either way.
-Worked example — model it step by step, thinking aloud: Is this a short-term or a long-term cause? In 1170, while Becket was in France, Henry asked the Archbishop of York to crown the next king. (1) Ask when it happened in relation to the murder. It happened while Becket was still in France, before his return and before the final quarrel. (2) Ask whether it is part of a build-up or a final spark. It added to a quarrel that had been running since 1164, so it is part of the build-up. (3) Your lesson's answer slide agrees: it marks this cause LT. (4) Write the judgement in a sentence: This is a long-term cause because it deepened the quarrel months before the murder rather than triggering it. Answer: A long-term cause: it deepened the quarrel before Becket returned, rather than triggering the murder itself..
+Worked example — model it step by step, thinking aloud: Is this a short-term or a long-term cause? In 1170, with Becket still in France, Henry had his son crowned by the Archbishop of York. (1) Ask when it happened in relation to the murder. It happened while Becket was still in France, before his return and before the final quarrel. (2) Ask whether it is part of a build-up or a final spark. It added to a quarrel that had been running since 1164, so it is part of the build-up. (3) Your lesson's answer slide agrees: it marks this cause LT. (4) Write the judgement in a sentence: This is a long-term cause because it deepened the quarrel months before the murder rather than triggering it. Answer: A long-term cause: it deepened the quarrel before Becket returned, rather than triggering the murder itself..
 Tip: ST = short-term, LT = long-term. Write the letters next to each cause, then check your pattern: the short-term causes should all come from the last few days.</a:t>
             </a:r>
             <a:endParaRPr lang="en-US" dirty="0"/>
@@ -2261,7 +2261,7 @@
 Historians also sort causes by time. A long-term cause builds up over months or years before the event. A short-term cause happens just before it, in the final days or hours. Both kinds are needed for an event to happen: the long-term causes load the gun, and the short-term causes pull the trigger.
 Your lesson's answer slide sorted the nine causes like this. Long-term: Henry's terrible temper; Henry asking the Archbishop of York to crown the next king; Becket breaking his promises on his return in 1170; Becket refusing to let the king punish the priests; Becket running away to France. Short-term: Henry shouting about the troublesome priest; Becket refusing to leave the cathedral; the knights deciding to kill Becket brutally; the knights setting off for Canterbury straight away.
 You may disagree with one or two of these, and that is allowed, as long as you can argue it. Becket's return and the excommunications happened in 1170, the same year as the murder, yet the slide calls them long-term. A historian might say they were the last step in a quarrel that had lasted six years, and so belong with the long-term causes. Another might say they were the spark. State your reason either way.
-Worked example — model it step by step, thinking aloud: Is this a short-term or a long-term cause? In 1170, while Becket was in France, Henry asked the Archbishop of York to crown the next king. (1) Ask when it happened in relation to the murder. It happened while Becket was still in France, before his return and before the final quarrel. (2) Ask whether it is part of a build-up or a final spark. It added to a quarrel that had been running since 1164, so it is part of the build-up. (3) Your lesson's answer slide agrees: it marks this cause LT. (4) Write the judgement in a sentence: This is a long-term cause because it deepened the quarrel months before the murder rather than triggering it. Answer: A long-term cause: it deepened the quarrel before Becket returned, rather than triggering the murder itself..
+Worked example — model it step by step, thinking aloud: Is this a short-term or a long-term cause? In 1170, with Becket still in France, Henry had his son crowned by the Archbishop of York. (1) Ask when it happened in relation to the murder. It happened while Becket was still in France, before his return and before the final quarrel. (2) Ask whether it is part of a build-up or a final spark. It added to a quarrel that had been running since 1164, so it is part of the build-up. (3) Your lesson's answer slide agrees: it marks this cause LT. (4) Write the judgement in a sentence: This is a long-term cause because it deepened the quarrel months before the murder rather than triggering it. Answer: A long-term cause: it deepened the quarrel before Becket returned, rather than triggering the murder itself..
 Tip: ST = short-term, LT = long-term. Write the letters next to each cause, then check your pattern: the short-term causes should all come from the last few days.</a:t>
             </a:r>
             <a:endParaRPr lang="en-US" dirty="0"/>
@@ -4029,7 +4029,7 @@
                 <a:ea typeface="Calibri" pitchFamily="34" charset="-122"/>
                 <a:cs typeface="Calibri" pitchFamily="34" charset="-120"/>
               </a:rPr>
-              <a:t>Is this a short-term or a long-term cause? In 1170, while Becket was in France, Henry asked the Archbishop of York to crown the next king.</a:t>
+              <a:t>Is this a short-term or a long-term cause? In 1170, with Becket still in France, Henry had his son crowned by the Archbishop of York.</a:t>
             </a:r>
             <a:endParaRPr lang="en-US" sz="2200" dirty="0"/>
           </a:p>
@@ -15627,7 +15627,7 @@
               <a:buNone/>
             </a:pPr>
             <a:r>
-              <a:rPr lang="en-US" sz="2000" dirty="0">
+              <a:rPr lang="en-US" sz="1800" dirty="0">
                 <a:solidFill>
                   <a:srgbClr val="1E2229"/>
                 </a:solidFill>
@@ -15635,9 +15635,9 @@
                 <a:ea typeface="Calibri" pitchFamily="34" charset="-122"/>
                 <a:cs typeface="Calibri" pitchFamily="34" charset="-120"/>
               </a:rPr>
-              <a:t>Your lesson gave you nine causes of the murder and asked you to sort them into three columns: King Henry was to blame, Thomas Becket was to blame, the knights were to blame.</a:t>
-            </a:r>
-            <a:endParaRPr lang="en-US" sz="2000" dirty="0"/>
+              <a:t>Your lesson gave you nine causes of the murder and asked you to sort them into three columns, one for each person who might be blamed: King Henry, Thomas Becket, or the knights.</a:t>
+            </a:r>
+            <a:endParaRPr lang="en-US" sz="1800" dirty="0"/>
           </a:p>
         </p:txBody>
       </p:sp>
@@ -15747,7 +15747,7 @@
               <a:buNone/>
             </a:pPr>
             <a:r>
-              <a:rPr lang="en-US" sz="2000" dirty="0">
+              <a:rPr lang="en-US" sz="1800" dirty="0">
                 <a:solidFill>
                   <a:srgbClr val="1E2229"/>
                 </a:solidFill>
@@ -15755,9 +15755,9 @@
                 <a:ea typeface="Calibri" pitchFamily="34" charset="-122"/>
                 <a:cs typeface="Calibri" pitchFamily="34" charset="-120"/>
               </a:rPr>
-              <a:t>Henry: he was well known for a terrible temper. In 1170 he asked the Archbishop of York to crown the next king, which should have been Becket's job.</a:t>
-            </a:r>
-            <a:endParaRPr lang="en-US" sz="2000" dirty="0"/>
+              <a:t>Henry: he was well known for a terrible temper. In 1170 he had the Archbishop of York crown the next king — a job that belonged to Becket.</a:t>
+            </a:r>
+            <a:endParaRPr lang="en-US" sz="1800" dirty="0"/>
           </a:p>
         </p:txBody>
       </p:sp>
@@ -15867,7 +15867,7 @@
               <a:buNone/>
             </a:pPr>
             <a:r>
-              <a:rPr lang="en-US" sz="2000" dirty="0">
+              <a:rPr lang="en-US" sz="1800" dirty="0">
                 <a:solidFill>
                   <a:srgbClr val="1E2229"/>
                 </a:solidFill>
@@ -15877,7 +15877,7 @@
               </a:rPr>
               <a:t>Notice the warning your lesson gave: some causes fit more than one column.</a:t>
             </a:r>
-            <a:endParaRPr lang="en-US" sz="2000" dirty="0"/>
+            <a:endParaRPr lang="en-US" sz="1800" dirty="0"/>
           </a:p>
         </p:txBody>
       </p:sp>
@@ -16833,7 +16833,7 @@
                 <a:ea typeface="Calibri" pitchFamily="34" charset="-122"/>
                 <a:cs typeface="Calibri" pitchFamily="34" charset="-120"/>
               </a:rPr>
-              <a:t>Is this a short-term or a long-term cause? In 1170, while Becket was in France, Henry asked the Archbishop of York to crown the next king.</a:t>
+              <a:t>Is this a short-term or a long-term cause? In 1170, with Becket still in France, Henry had his son crowned by the Archbishop of York.</a:t>
             </a:r>
             <a:endParaRPr lang="en-US" sz="2200" dirty="0"/>
           </a:p>
